--- a/Praesentation/ice-truck-praesentation.pptx
+++ b/Praesentation/ice-truck-praesentation.pptx
@@ -15168,7 +15168,7 @@
                 </a:solidFill>
                 <a:latin typeface="Calibri"/>
               </a:rPr>
-              <a:t>Ausblick:</a:t>
+              <a:t>Challenge III (Cloud) – Sensor-Drift realisiert:</a:t>
             </a:r>
             <a:r>
               <a:rPr sz="1500">
@@ -15177,7 +15177,7 @@
                 </a:solidFill>
                 <a:latin typeface="Calibri"/>
               </a:rPr>
-              <a:t> Challenge III (Cloud-Speicherung/-Auswertung) – noch nicht begonnen</a:t>
+              <a:t> ThingSpeak-Kanal mit MATLAB-Visualisierung (1-min-Mittel der Abweichung beider Sensoren, Warnschwelle 3 °C) zeigt, ob die beiden KY-028 auseinanderlaufen – Predictive Maintenance. Azure-IoT-Hub-Anbindung vorbereitet, Ende-zu-Ende-Test steht noch aus</a:t>
             </a:r>
           </a:p>
         </p:txBody>

--- a/Praesentation/ice-truck-praesentation.pptx
+++ b/Praesentation/ice-truck-praesentation.pptx
@@ -15021,7 +15021,7 @@
                 </a:solidFill>
                 <a:latin typeface="Calibri"/>
               </a:rPr>
-              <a:t> I2C-Bug behoben, Regellogik pytest-getestet, SQLite-Logging live im Systemd-Service, Node-RED-Flow importiert und mit echten Live-Daten verifiziert (Lese-Richtung)</a:t>
+              <a:t> I2C-Bug behoben, Regellogik pytest-getestet, SQLite-Logging live im Systemd-Service, Node-RED-Flow importiert und mit echten Live-Daten verifiziert (Lese-Richtung), Broker-Auth läuft wieder (die Handy-Verbindungsfehler kamen von der wechselnden Hotspot-IP, nicht von der Authentifizierung)</a:t>
             </a:r>
           </a:p>
           <a:p>
@@ -15045,7 +15045,7 @@
                 </a:solidFill>
                 <a:latin typeface="Calibri"/>
               </a:rPr>
-              <a:t>Noch offen, braucht kurz Root-Zugriff auf dem Pi:</a:t>
+              <a:t>Noch offen:</a:t>
             </a:r>
           </a:p>
           <a:p>
@@ -15069,7 +15069,34 @@
                 </a:solidFill>
                 <a:latin typeface="Calibri"/>
               </a:rPr>
-              <a:t>Broker-Auth hängt seit 24.09. in einer Reconnect-Schleife – Passwort/Credentials müssen neu gesetzt werden</a:t>
+              <a:t>Backend-Service hält noch alten Code im Speicher (kein </a:t>
+            </a:r>
+            <a:r>
+              <a:rPr sz="1300">
+                <a:solidFill>
+                  <a:srgbClr val="124A5E"/>
+                </a:solidFill>
+                <a:latin typeface="Consolas"/>
+              </a:rPr>
+              <a:t>control_state</a:t>
+            </a:r>
+            <a:r>
+              <a:rPr sz="1300">
+                <a:solidFill>
+                  <a:srgbClr val="1C1F22"/>
+                </a:solidFill>
+                <a:latin typeface="Calibri"/>
+              </a:rPr>
+              <a:t>-Support) – braucht kurz sudo: </a:t>
+            </a:r>
+            <a:r>
+              <a:rPr sz="1300">
+                <a:solidFill>
+                  <a:srgbClr val="124A5E"/>
+                </a:solidFill>
+                <a:latin typeface="Consolas"/>
+              </a:rPr>
+              <a:t>systemctl restart</a:t>
             </a:r>
           </a:p>
           <a:p>
@@ -15093,58 +15120,7 @@
                 </a:solidFill>
                 <a:latin typeface="Calibri"/>
               </a:rPr>
-              <a:t>Backend-Service hält noch alten Code im Speicher (kein </a:t>
-            </a:r>
-            <a:r>
-              <a:rPr sz="1300">
-                <a:solidFill>
-                  <a:srgbClr val="124A5E"/>
-                </a:solidFill>
-                <a:latin typeface="Consolas"/>
-              </a:rPr>
-              <a:t>control_state</a:t>
-            </a:r>
-            <a:r>
-              <a:rPr sz="1300">
-                <a:solidFill>
-                  <a:srgbClr val="1C1F22"/>
-                </a:solidFill>
-                <a:latin typeface="Calibri"/>
-              </a:rPr>
-              <a:t>-Support) – braucht </a:t>
-            </a:r>
-            <a:r>
-              <a:rPr sz="1300">
-                <a:solidFill>
-                  <a:srgbClr val="124A5E"/>
-                </a:solidFill>
-                <a:latin typeface="Consolas"/>
-              </a:rPr>
-              <a:t>systemctl restart</a:t>
-            </a:r>
-          </a:p>
-          <a:p>
-            <a:pPr marL="457200" indent="-457200">
-              <a:lnSpc>
-                <a:spcPct val="112000"/>
-              </a:lnSpc>
-              <a:spcAft>
-                <a:spcPts val="800"/>
-              </a:spcAft>
-              <a:buClr>
-                <a:srgbClr val="1F8A4C"/>
-              </a:buClr>
-              <a:buFont typeface="Arial"/>
-              <a:buChar char="–"/>
-            </a:pPr>
-            <a:r>
-              <a:rPr sz="1300">
-                <a:solidFill>
-                  <a:srgbClr val="1C1F22"/>
-                </a:solidFill>
-                <a:latin typeface="Calibri"/>
-              </a:rPr>
-              <a:t>MQTT Dash auf einem echten Handy noch nicht konfiguriert</a:t>
+              <a:t>MQTT Dash auf einem echten Handy noch nicht konfiguriert (Broker-IP im Hotspot wechselt, vorher hostname -I prüfen)</a:t>
             </a:r>
           </a:p>
           <a:p>
